--- a/examples/ppt/charts/charts-column.pptx
+++ b/examples/ppt/charts/charts-column.pptx
@@ -5,14 +5,14 @@
     <p:sldMasterId xmlns:r="http://schemas.openxmlformats.org/officeDocument/2006/relationships" id="2147483648" r:id="rId1"/>
   </p:sldMasterIdLst>
   <p:sldIdLst>
-    <p:sldId id="256" r:id="R25d95b1e81724f72"/>
-    <p:sldId id="257" r:id="R6c11001ff2a84cdc"/>
-    <p:sldId id="258" r:id="R1c769ee78d964db1"/>
-    <p:sldId id="259" r:id="Ra18f7ae0b35f4f79"/>
-    <p:sldId id="260" r:id="Raf324605477748a3"/>
-    <p:sldId id="261" r:id="R75c12b2be43d4b46"/>
-    <p:sldId id="262" r:id="R1215c00c7e8b4e5d"/>
-    <p:sldId id="263" r:id="R8e644f06ff5c4f58"/>
+    <p:sldId id="256" r:id="Rc191238badf4471a"/>
+    <p:sldId id="257" r:id="R3489e8a581704d45"/>
+    <p:sldId id="258" r:id="R5fe2b7b7132e4151"/>
+    <p:sldId id="259" r:id="R751d637464b142bb"/>
+    <p:sldId id="260" r:id="R72b5f088a54245c0"/>
+    <p:sldId id="261" r:id="R869d8d7ed43b4202"/>
+    <p:sldId id="262" r:id="Ra09c3e6d04354959"/>
+    <p:sldId id="263" r:id="R4253e184ceb6487c"/>
   </p:sldIdLst>
   <p:sldSz cx="12192000" cy="6858000"/>
   <p:notesSz cx="6858000" cy="9144000"/>
@@ -287,7 +287,7 @@
 </file>
 
 <file path=ppt/slideMasters/slideMaster1.xml><?xml version="1.0" encoding="utf-8"?>
-<p:sldMaster xmlns:p="http://schemas.openxmlformats.org/presentationml/2006/main">
+<p:sldMaster xmlns:r="http://schemas.openxmlformats.org/officeDocument/2006/relationships" xmlns:p="http://schemas.openxmlformats.org/presentationml/2006/main">
   <p:cSld>
     <p:spTree>
       <p:nvGrpSpPr>
@@ -557,10 +557,12 @@
             <a:lstStyle xmlns:a="http://schemas.openxmlformats.org/drawingml/2006/main"/>
             <a:p xmlns:a="http://schemas.openxmlformats.org/drawingml/2006/main">
               <a:pPr>
-                <a:defRPr sz="900" b="0">
+                <a:defRPr sz="900">
                   <a:solidFill>
                     <a:srgbClr val="FFFFFF"/>
                   </a:solidFill>
+                  <a:latin typeface="Calibri"/>
+                  <a:ea typeface="Calibri"/>
                 </a:defRPr>
               </a:pPr>
             </a:p>
@@ -789,10 +791,12 @@
             <a:lstStyle xmlns:a="http://schemas.openxmlformats.org/drawingml/2006/main"/>
             <a:p xmlns:a="http://schemas.openxmlformats.org/drawingml/2006/main">
               <a:pPr>
-                <a:defRPr sz="900" b="0">
+                <a:defRPr sz="900">
                   <a:solidFill>
                     <a:srgbClr val="FFFFFF"/>
                   </a:solidFill>
+                  <a:latin typeface="Calibri"/>
+                  <a:ea typeface="Calibri"/>
                 </a:defRPr>
               </a:pPr>
             </a:p>
@@ -1521,12 +1525,6 @@
       <c:lineChart>
         <c:grouping val="standard"/>
         <c:varyColors val="0"/>
-        <c:axId val="1"/>
-        <c:axId val="2"/>
-      </c:lineChart>
-      <c:lineChart>
-        <c:grouping val="standard"/>
-        <c:varyColors val="0"/>
         <c:ser>
           <c:idx val="1"/>
           <c:order val="1"/>
@@ -1534,9 +1532,11 @@
             <c:v>Growth %</c:v>
           </c:tx>
           <c:spPr>
-            <a:solidFill xmlns:a="http://schemas.openxmlformats.org/drawingml/2006/main">
-              <a:srgbClr val="ED7D31"/>
-            </a:solidFill>
+            <a:ln xmlns:a="http://schemas.openxmlformats.org/drawingml/2006/main" w="25400">
+              <a:solidFill>
+                <a:srgbClr val="ED7D31"/>
+              </a:solidFill>
+            </a:ln>
           </c:spPr>
           <c:cat>
             <c:strLit>
@@ -2943,7 +2943,7 @@
           <c:errBars>
             <c:errDir val="y"/>
             <c:errBarType val="both"/>
-            <c:errValType val="fixedVal"/>
+            <c:errValType val="percentage"/>
             <c:plus>
               <c:numLit>
                 <c:formatCode>General</c:formatCode>
@@ -5751,10 +5751,12 @@
             <a:lstStyle xmlns:a="http://schemas.openxmlformats.org/drawingml/2006/main"/>
             <a:p xmlns:a="http://schemas.openxmlformats.org/drawingml/2006/main">
               <a:pPr>
-                <a:defRPr sz="1000" b="0">
+                <a:defRPr sz="1000">
                   <a:solidFill>
                     <a:srgbClr val="333333"/>
                   </a:solidFill>
+                  <a:latin typeface="Calibri"/>
+                  <a:ea typeface="Calibri"/>
                 </a:defRPr>
               </a:pPr>
             </a:p>
@@ -5821,8 +5823,8 @@
       <p:grpSpPr/>
       <p:sp>
         <p:nvSpPr>
-          <p:cNvPr id="10000" name="TextBox 1"/>
-          <p:cNvSpPr/>
+          <p:cNvPr id="100000" name="TextBox 1"/>
+          <p:cNvSpPr txBox="1"/>
           <p:nvPr/>
         </p:nvSpPr>
         <p:spPr>
@@ -5849,7 +5851,7 @@
       </p:sp>
       <p:graphicFrame>
         <p:nvGraphicFramePr>
-          <p:cNvPr id="10001" name="column"/>
+          <p:cNvPr id="100001" name="column"/>
           <p:cNvGraphicFramePr/>
           <p:nvPr/>
         </p:nvGraphicFramePr>
@@ -5859,13 +5861,13 @@
         </p:xfrm>
         <a:graphic xmlns:a="http://schemas.openxmlformats.org/drawingml/2006/main">
           <a:graphicData uri="http://schemas.openxmlformats.org/drawingml/2006/chart">
-            <c:chart xmlns:r="http://schemas.openxmlformats.org/officeDocument/2006/relationships" xmlns:c="http://schemas.openxmlformats.org/drawingml/2006/chart" r:id="R165a0a765249490e"/>
+            <c:chart xmlns:r="http://schemas.openxmlformats.org/officeDocument/2006/relationships" xmlns:c="http://schemas.openxmlformats.org/drawingml/2006/chart" r:id="Re4ba51822b0d430a"/>
           </a:graphicData>
         </a:graphic>
       </p:graphicFrame>
       <p:graphicFrame>
         <p:nvGraphicFramePr>
-          <p:cNvPr id="10002" name="stackedColumn"/>
+          <p:cNvPr id="100002" name="stackedColumn"/>
           <p:cNvGraphicFramePr/>
           <p:nvPr/>
         </p:nvGraphicFramePr>
@@ -5875,13 +5877,13 @@
         </p:xfrm>
         <a:graphic xmlns:a="http://schemas.openxmlformats.org/drawingml/2006/main">
           <a:graphicData uri="http://schemas.openxmlformats.org/drawingml/2006/chart">
-            <c:chart xmlns:r="http://schemas.openxmlformats.org/officeDocument/2006/relationships" xmlns:c="http://schemas.openxmlformats.org/drawingml/2006/chart" r:id="Rdf2879ab518e4dae"/>
+            <c:chart xmlns:r="http://schemas.openxmlformats.org/officeDocument/2006/relationships" xmlns:c="http://schemas.openxmlformats.org/drawingml/2006/chart" r:id="Rfbae59c7332b4e21"/>
           </a:graphicData>
         </a:graphic>
       </p:graphicFrame>
       <p:graphicFrame>
         <p:nvGraphicFramePr>
-          <p:cNvPr id="10003" name="percentStackedColumn"/>
+          <p:cNvPr id="100003" name="percentStackedColumn"/>
           <p:cNvGraphicFramePr/>
           <p:nvPr/>
         </p:nvGraphicFramePr>
@@ -5891,13 +5893,13 @@
         </p:xfrm>
         <a:graphic xmlns:a="http://schemas.openxmlformats.org/drawingml/2006/main">
           <a:graphicData uri="http://schemas.openxmlformats.org/drawingml/2006/chart">
-            <c:chart xmlns:r="http://schemas.openxmlformats.org/officeDocument/2006/relationships" xmlns:c="http://schemas.openxmlformats.org/drawingml/2006/chart" r:id="Re0605430c7f34a77"/>
+            <c:chart xmlns:r="http://schemas.openxmlformats.org/officeDocument/2006/relationships" xmlns:c="http://schemas.openxmlformats.org/drawingml/2006/chart" r:id="R539b47b1ec254746"/>
           </a:graphicData>
         </a:graphic>
       </p:graphicFrame>
       <p:graphicFrame>
         <p:nvGraphicFramePr>
-          <p:cNvPr id="10004" name="column3d (view3d=15,20,30)"/>
+          <p:cNvPr id="100004" name="column3d (view3d=15,20,30)"/>
           <p:cNvGraphicFramePr/>
           <p:nvPr/>
         </p:nvGraphicFramePr>
@@ -5907,7 +5909,7 @@
         </p:xfrm>
         <a:graphic xmlns:a="http://schemas.openxmlformats.org/drawingml/2006/main">
           <a:graphicData uri="http://schemas.openxmlformats.org/drawingml/2006/chart">
-            <c:chart xmlns:r="http://schemas.openxmlformats.org/officeDocument/2006/relationships" xmlns:c="http://schemas.openxmlformats.org/drawingml/2006/chart" r:id="Rc8a9e02faf614c1f"/>
+            <c:chart xmlns:r="http://schemas.openxmlformats.org/officeDocument/2006/relationships" xmlns:c="http://schemas.openxmlformats.org/drawingml/2006/chart" r:id="R3019000669904cb9"/>
           </a:graphicData>
         </a:graphic>
       </p:graphicFrame>
@@ -5928,8 +5930,8 @@
       <p:grpSpPr/>
       <p:sp>
         <p:nvSpPr>
-          <p:cNvPr id="10005" name="TextBox 1"/>
-          <p:cNvSpPr/>
+          <p:cNvPr id="100005" name="TextBox 1"/>
+          <p:cNvSpPr txBox="1"/>
           <p:nvPr/>
         </p:nvSpPr>
         <p:spPr>
@@ -5956,7 +5958,7 @@
       </p:sp>
       <p:graphicFrame>
         <p:nvGraphicFramePr>
-          <p:cNvPr id="10006" name="Styled title"/>
+          <p:cNvPr id="100006" name="Styled title"/>
           <p:cNvGraphicFramePr/>
           <p:nvPr/>
         </p:nvGraphicFramePr>
@@ -5966,13 +5968,13 @@
         </p:xfrm>
         <a:graphic xmlns:a="http://schemas.openxmlformats.org/drawingml/2006/main">
           <a:graphicData uri="http://schemas.openxmlformats.org/drawingml/2006/chart">
-            <c:chart xmlns:r="http://schemas.openxmlformats.org/officeDocument/2006/relationships" xmlns:c="http://schemas.openxmlformats.org/drawingml/2006/chart" r:id="Ra4afb6a13c0b4d05"/>
+            <c:chart xmlns:r="http://schemas.openxmlformats.org/officeDocument/2006/relationships" xmlns:c="http://schemas.openxmlformats.org/drawingml/2006/chart" r:id="R97d60b81b0f14ba8"/>
           </a:graphicData>
         </a:graphic>
       </p:graphicFrame>
       <p:graphicFrame>
         <p:nvGraphicFramePr>
-          <p:cNvPr id="10007" name="legend=top + legendFont"/>
+          <p:cNvPr id="100007" name="legend=top + legendFont"/>
           <p:cNvGraphicFramePr/>
           <p:nvPr/>
         </p:nvGraphicFramePr>
@@ -5982,13 +5984,13 @@
         </p:xfrm>
         <a:graphic xmlns:a="http://schemas.openxmlformats.org/drawingml/2006/main">
           <a:graphicData uri="http://schemas.openxmlformats.org/drawingml/2006/chart">
-            <c:chart xmlns:r="http://schemas.openxmlformats.org/officeDocument/2006/relationships" xmlns:c="http://schemas.openxmlformats.org/drawingml/2006/chart" r:id="Rb3769ae781cf4455"/>
+            <c:chart xmlns:r="http://schemas.openxmlformats.org/officeDocument/2006/relationships" xmlns:c="http://schemas.openxmlformats.org/drawingml/2006/chart" r:id="Rc2fc693e93c84544"/>
           </a:graphicData>
         </a:graphic>
       </p:graphicFrame>
       <p:graphicFrame>
         <p:nvGraphicFramePr>
-          <p:cNvPr id="10008" name="legend=topRight overlay"/>
+          <p:cNvPr id="100008" name="legend=topRight overlay"/>
           <p:cNvGraphicFramePr/>
           <p:nvPr/>
         </p:nvGraphicFramePr>
@@ -5998,13 +6000,13 @@
         </p:xfrm>
         <a:graphic xmlns:a="http://schemas.openxmlformats.org/drawingml/2006/main">
           <a:graphicData uri="http://schemas.openxmlformats.org/drawingml/2006/chart">
-            <c:chart xmlns:r="http://schemas.openxmlformats.org/officeDocument/2006/relationships" xmlns:c="http://schemas.openxmlformats.org/drawingml/2006/chart" r:id="R2bda799c463e446d"/>
+            <c:chart xmlns:r="http://schemas.openxmlformats.org/officeDocument/2006/relationships" xmlns:c="http://schemas.openxmlformats.org/drawingml/2006/chart" r:id="R96c526ba28364374"/>
           </a:graphicData>
         </a:graphic>
       </p:graphicFrame>
       <p:graphicFrame>
         <p:nvGraphicFramePr>
-          <p:cNvPr id="10009" name="Chart 4"/>
+          <p:cNvPr id="100009" name="Chart 4"/>
           <p:cNvGraphicFramePr/>
           <p:nvPr/>
         </p:nvGraphicFramePr>
@@ -6014,7 +6016,7 @@
         </p:xfrm>
         <a:graphic xmlns:a="http://schemas.openxmlformats.org/drawingml/2006/main">
           <a:graphicData uri="http://schemas.openxmlformats.org/drawingml/2006/chart">
-            <c:chart xmlns:r="http://schemas.openxmlformats.org/officeDocument/2006/relationships" xmlns:c="http://schemas.openxmlformats.org/drawingml/2006/chart" r:id="Rd891a442ae6d4c10"/>
+            <c:chart xmlns:r="http://schemas.openxmlformats.org/officeDocument/2006/relationships" xmlns:c="http://schemas.openxmlformats.org/drawingml/2006/chart" r:id="R95061cb447e4409b"/>
           </a:graphicData>
         </a:graphic>
       </p:graphicFrame>
@@ -6035,8 +6037,8 @@
       <p:grpSpPr/>
       <p:sp>
         <p:nvSpPr>
-          <p:cNvPr id="10010" name="TextBox 1"/>
-          <p:cNvSpPr/>
+          <p:cNvPr id="100010" name="TextBox 1"/>
+          <p:cNvSpPr txBox="1"/>
           <p:nvPr/>
         </p:nvSpPr>
         <p:spPr>
@@ -6063,7 +6065,7 @@
       </p:sp>
       <p:graphicFrame>
         <p:nvGraphicFramePr>
-          <p:cNvPr id="10011" name="value @ outsideEnd"/>
+          <p:cNvPr id="100011" name="value @ outsideEnd"/>
           <p:cNvGraphicFramePr/>
           <p:nvPr/>
         </p:nvGraphicFramePr>
@@ -6073,13 +6075,13 @@
         </p:xfrm>
         <a:graphic xmlns:a="http://schemas.openxmlformats.org/drawingml/2006/main">
           <a:graphicData uri="http://schemas.openxmlformats.org/drawingml/2006/chart">
-            <c:chart xmlns:r="http://schemas.openxmlformats.org/officeDocument/2006/relationships" xmlns:c="http://schemas.openxmlformats.org/drawingml/2006/chart" r:id="R6960ef3704b948ee"/>
+            <c:chart xmlns:r="http://schemas.openxmlformats.org/officeDocument/2006/relationships" xmlns:c="http://schemas.openxmlformats.org/drawingml/2006/chart" r:id="R79029f899bfd4624"/>
           </a:graphicData>
         </a:graphic>
       </p:graphicFrame>
       <p:graphicFrame>
         <p:nvGraphicFramePr>
-          <p:cNvPr id="10012" name="value,category @ insideEnd"/>
+          <p:cNvPr id="100012" name="value,category @ insideEnd"/>
           <p:cNvGraphicFramePr/>
           <p:nvPr/>
         </p:nvGraphicFramePr>
@@ -6089,13 +6091,13 @@
         </p:xfrm>
         <a:graphic xmlns:a="http://schemas.openxmlformats.org/drawingml/2006/main">
           <a:graphicData uri="http://schemas.openxmlformats.org/drawingml/2006/chart">
-            <c:chart xmlns:r="http://schemas.openxmlformats.org/officeDocument/2006/relationships" xmlns:c="http://schemas.openxmlformats.org/drawingml/2006/chart" r:id="R6f72d9274a7749c0"/>
+            <c:chart xmlns:r="http://schemas.openxmlformats.org/officeDocument/2006/relationships" xmlns:c="http://schemas.openxmlformats.org/drawingml/2006/chart" r:id="Raa0ce138c3a34b5b"/>
           </a:graphicData>
         </a:graphic>
       </p:graphicFrame>
       <p:graphicFrame>
         <p:nvGraphicFramePr>
-          <p:cNvPr id="10013" name="stacked + center labels"/>
+          <p:cNvPr id="100013" name="stacked + center labels"/>
           <p:cNvGraphicFramePr/>
           <p:nvPr/>
         </p:nvGraphicFramePr>
@@ -6105,13 +6107,13 @@
         </p:xfrm>
         <a:graphic xmlns:a="http://schemas.openxmlformats.org/drawingml/2006/main">
           <a:graphicData uri="http://schemas.openxmlformats.org/drawingml/2006/chart">
-            <c:chart xmlns:r="http://schemas.openxmlformats.org/officeDocument/2006/relationships" xmlns:c="http://schemas.openxmlformats.org/drawingml/2006/chart" r:id="Rdc3f095be655415f"/>
+            <c:chart xmlns:r="http://schemas.openxmlformats.org/officeDocument/2006/relationships" xmlns:c="http://schemas.openxmlformats.org/drawingml/2006/chart" r:id="Rb38420c8e45a4301"/>
           </a:graphicData>
         </a:graphic>
       </p:graphicFrame>
       <p:graphicFrame>
         <p:nvGraphicFramePr>
-          <p:cNvPr id="10014" name="dataLabels=none"/>
+          <p:cNvPr id="100014" name="dataLabels=none"/>
           <p:cNvGraphicFramePr/>
           <p:nvPr/>
         </p:nvGraphicFramePr>
@@ -6121,7 +6123,7 @@
         </p:xfrm>
         <a:graphic xmlns:a="http://schemas.openxmlformats.org/drawingml/2006/main">
           <a:graphicData uri="http://schemas.openxmlformats.org/drawingml/2006/chart">
-            <c:chart xmlns:r="http://schemas.openxmlformats.org/officeDocument/2006/relationships" xmlns:c="http://schemas.openxmlformats.org/drawingml/2006/chart" r:id="R6aeff10b67fe428b"/>
+            <c:chart xmlns:r="http://schemas.openxmlformats.org/officeDocument/2006/relationships" xmlns:c="http://schemas.openxmlformats.org/drawingml/2006/chart" r:id="R5be61b956fcd459d"/>
           </a:graphicData>
         </a:graphic>
       </p:graphicFrame>
@@ -6142,8 +6144,8 @@
       <p:grpSpPr/>
       <p:sp>
         <p:nvSpPr>
-          <p:cNvPr id="10015" name="TextBox 1"/>
-          <p:cNvSpPr/>
+          <p:cNvPr id="100015" name="TextBox 1"/>
+          <p:cNvSpPr txBox="1"/>
           <p:nvPr/>
         </p:nvSpPr>
         <p:spPr>
@@ -6170,7 +6172,7 @@
       </p:sp>
       <p:graphicFrame>
         <p:nvGraphicFramePr>
-          <p:cNvPr id="10016" name="axis min/max + titles + numfmt"/>
+          <p:cNvPr id="100016" name="axis min/max + titles + numfmt"/>
           <p:cNvGraphicFramePr/>
           <p:nvPr/>
         </p:nvGraphicFramePr>
@@ -6180,13 +6182,13 @@
         </p:xfrm>
         <a:graphic xmlns:a="http://schemas.openxmlformats.org/drawingml/2006/main">
           <a:graphicData uri="http://schemas.openxmlformats.org/drawingml/2006/chart">
-            <c:chart xmlns:r="http://schemas.openxmlformats.org/officeDocument/2006/relationships" xmlns:c="http://schemas.openxmlformats.org/drawingml/2006/chart" r:id="R460a6e57076c4128"/>
+            <c:chart xmlns:r="http://schemas.openxmlformats.org/officeDocument/2006/relationships" xmlns:c="http://schemas.openxmlformats.org/drawingml/2006/chart" r:id="Rf2b318e3a996433c"/>
           </a:graphicData>
         </a:graphic>
       </p:graphicFrame>
       <p:graphicFrame>
         <p:nvGraphicFramePr>
-          <p:cNvPr id="10017" name="gridlines + minorGridlines + ticks"/>
+          <p:cNvPr id="100017" name="gridlines + minorGridlines + ticks"/>
           <p:cNvGraphicFramePr/>
           <p:nvPr/>
         </p:nvGraphicFramePr>
@@ -6196,13 +6198,13 @@
         </p:xfrm>
         <a:graphic xmlns:a="http://schemas.openxmlformats.org/drawingml/2006/main">
           <a:graphicData uri="http://schemas.openxmlformats.org/drawingml/2006/chart">
-            <c:chart xmlns:r="http://schemas.openxmlformats.org/officeDocument/2006/relationships" xmlns:c="http://schemas.openxmlformats.org/drawingml/2006/chart" r:id="Raf10a76e48474719"/>
+            <c:chart xmlns:r="http://schemas.openxmlformats.org/officeDocument/2006/relationships" xmlns:c="http://schemas.openxmlformats.org/drawingml/2006/chart" r:id="R2394bd00c51c421a"/>
           </a:graphicData>
         </a:graphic>
       </p:graphicFrame>
       <p:graphicFrame>
         <p:nvGraphicFramePr>
-          <p:cNvPr id="10018" name="dispunits=thousands"/>
+          <p:cNvPr id="100018" name="dispunits=thousands"/>
           <p:cNvGraphicFramePr/>
           <p:nvPr/>
         </p:nvGraphicFramePr>
@@ -6212,13 +6214,13 @@
         </p:xfrm>
         <a:graphic xmlns:a="http://schemas.openxmlformats.org/drawingml/2006/main">
           <a:graphicData uri="http://schemas.openxmlformats.org/drawingml/2006/chart">
-            <c:chart xmlns:r="http://schemas.openxmlformats.org/officeDocument/2006/relationships" xmlns:c="http://schemas.openxmlformats.org/drawingml/2006/chart" r:id="R53e7bfa0991a4917"/>
+            <c:chart xmlns:r="http://schemas.openxmlformats.org/officeDocument/2006/relationships" xmlns:c="http://schemas.openxmlformats.org/drawingml/2006/chart" r:id="R9f869bfc58d943df"/>
           </a:graphicData>
         </a:graphic>
       </p:graphicFrame>
       <p:graphicFrame>
         <p:nvGraphicFramePr>
-          <p:cNvPr id="10019" name="secondaryaxis=2 (line on right)"/>
+          <p:cNvPr id="100019" name="secondaryaxis=2 (line on right)"/>
           <p:cNvGraphicFramePr/>
           <p:nvPr/>
         </p:nvGraphicFramePr>
@@ -6228,7 +6230,7 @@
         </p:xfrm>
         <a:graphic xmlns:a="http://schemas.openxmlformats.org/drawingml/2006/main">
           <a:graphicData uri="http://schemas.openxmlformats.org/drawingml/2006/chart">
-            <c:chart xmlns:r="http://schemas.openxmlformats.org/officeDocument/2006/relationships" xmlns:c="http://schemas.openxmlformats.org/drawingml/2006/chart" r:id="R27141ad8c0ca4f15"/>
+            <c:chart xmlns:r="http://schemas.openxmlformats.org/officeDocument/2006/relationships" xmlns:c="http://schemas.openxmlformats.org/drawingml/2006/chart" r:id="R5d52b5f9641c4a4c"/>
           </a:graphicData>
         </a:graphic>
       </p:graphicFrame>
@@ -6249,8 +6251,8 @@
       <p:grpSpPr/>
       <p:sp>
         <p:nvSpPr>
-          <p:cNvPr id="10020" name="TextBox 1"/>
-          <p:cNvSpPr/>
+          <p:cNvPr id="100020" name="TextBox 1"/>
+          <p:cNvSpPr txBox="1"/>
           <p:nvPr/>
         </p:nvSpPr>
         <p:spPr>
@@ -6277,7 +6279,7 @@
       </p:sp>
       <p:graphicFrame>
         <p:nvGraphicFramePr>
-          <p:cNvPr id="10021" name="colors + seriesoutline"/>
+          <p:cNvPr id="100021" name="colors + seriesoutline"/>
           <p:cNvGraphicFramePr/>
           <p:nvPr/>
         </p:nvGraphicFramePr>
@@ -6287,13 +6289,13 @@
         </p:xfrm>
         <a:graphic xmlns:a="http://schemas.openxmlformats.org/drawingml/2006/main">
           <a:graphicData uri="http://schemas.openxmlformats.org/drawingml/2006/chart">
-            <c:chart xmlns:r="http://schemas.openxmlformats.org/officeDocument/2006/relationships" xmlns:c="http://schemas.openxmlformats.org/drawingml/2006/chart" r:id="R09f31dd5fca54bb8"/>
+            <c:chart xmlns:r="http://schemas.openxmlformats.org/officeDocument/2006/relationships" xmlns:c="http://schemas.openxmlformats.org/drawingml/2006/chart" r:id="R38e9fa48b9fb4f74"/>
           </a:graphicData>
         </a:graphic>
       </p:graphicFrame>
       <p:graphicFrame>
         <p:nvGraphicFramePr>
-          <p:cNvPr id="10022" name="gradient + seriesshadow"/>
+          <p:cNvPr id="100022" name="gradient + seriesshadow"/>
           <p:cNvGraphicFramePr/>
           <p:nvPr/>
         </p:nvGraphicFramePr>
@@ -6303,13 +6305,13 @@
         </p:xfrm>
         <a:graphic xmlns:a="http://schemas.openxmlformats.org/drawingml/2006/main">
           <a:graphicData uri="http://schemas.openxmlformats.org/drawingml/2006/chart">
-            <c:chart xmlns:r="http://schemas.openxmlformats.org/officeDocument/2006/relationships" xmlns:c="http://schemas.openxmlformats.org/drawingml/2006/chart" r:id="Rda0db4bf635a4921"/>
+            <c:chart xmlns:r="http://schemas.openxmlformats.org/officeDocument/2006/relationships" xmlns:c="http://schemas.openxmlformats.org/drawingml/2006/chart" r:id="R9d231ef01af542f6"/>
           </a:graphicData>
         </a:graphic>
       </p:graphicFrame>
       <p:graphicFrame>
         <p:nvGraphicFramePr>
-          <p:cNvPr id="10023" name="per-series gradients + transparency=30"/>
+          <p:cNvPr id="100023" name="per-series gradients + transparency=30"/>
           <p:cNvGraphicFramePr/>
           <p:nvPr/>
         </p:nvGraphicFramePr>
@@ -6319,13 +6321,13 @@
         </p:xfrm>
         <a:graphic xmlns:a="http://schemas.openxmlformats.org/drawingml/2006/main">
           <a:graphicData uri="http://schemas.openxmlformats.org/drawingml/2006/chart">
-            <c:chart xmlns:r="http://schemas.openxmlformats.org/officeDocument/2006/relationships" xmlns:c="http://schemas.openxmlformats.org/drawingml/2006/chart" r:id="Ra97e69ea45ee4b54"/>
+            <c:chart xmlns:r="http://schemas.openxmlformats.org/officeDocument/2006/relationships" xmlns:c="http://schemas.openxmlformats.org/drawingml/2006/chart" r:id="R5e37f3def0164715"/>
           </a:graphicData>
         </a:graphic>
       </p:graphicFrame>
       <p:graphicFrame>
         <p:nvGraphicFramePr>
-          <p:cNvPr id="10024" name="invertifneg + colorrule"/>
+          <p:cNvPr id="100024" name="invertifneg + colorrule"/>
           <p:cNvGraphicFramePr/>
           <p:nvPr/>
         </p:nvGraphicFramePr>
@@ -6335,7 +6337,7 @@
         </p:xfrm>
         <a:graphic xmlns:a="http://schemas.openxmlformats.org/drawingml/2006/main">
           <a:graphicData uri="http://schemas.openxmlformats.org/drawingml/2006/chart">
-            <c:chart xmlns:r="http://schemas.openxmlformats.org/officeDocument/2006/relationships" xmlns:c="http://schemas.openxmlformats.org/drawingml/2006/chart" r:id="Rfb88dc726d9942ec"/>
+            <c:chart xmlns:r="http://schemas.openxmlformats.org/officeDocument/2006/relationships" xmlns:c="http://schemas.openxmlformats.org/drawingml/2006/chart" r:id="R55cc680b731448fc"/>
           </a:graphicData>
         </a:graphic>
       </p:graphicFrame>
@@ -6356,8 +6358,8 @@
       <p:grpSpPr/>
       <p:sp>
         <p:nvSpPr>
-          <p:cNvPr id="10025" name="TextBox 1"/>
-          <p:cNvSpPr/>
+          <p:cNvPr id="100025" name="TextBox 1"/>
+          <p:cNvSpPr txBox="1"/>
           <p:nvPr/>
         </p:nvSpPr>
         <p:spPr>
@@ -6384,7 +6386,7 @@
       </p:sp>
       <p:graphicFrame>
         <p:nvGraphicFramePr>
-          <p:cNvPr id="10026" name="gapwidth=50 + overlap=20"/>
+          <p:cNvPr id="100026" name="gapwidth=50 + overlap=20"/>
           <p:cNvGraphicFramePr/>
           <p:nvPr/>
         </p:nvGraphicFramePr>
@@ -6394,13 +6396,13 @@
         </p:xfrm>
         <a:graphic xmlns:a="http://schemas.openxmlformats.org/drawingml/2006/main">
           <a:graphicData uri="http://schemas.openxmlformats.org/drawingml/2006/chart">
-            <c:chart xmlns:r="http://schemas.openxmlformats.org/officeDocument/2006/relationships" xmlns:c="http://schemas.openxmlformats.org/drawingml/2006/chart" r:id="R6c9d92c52cc14a2b"/>
+            <c:chart xmlns:r="http://schemas.openxmlformats.org/officeDocument/2006/relationships" xmlns:c="http://schemas.openxmlformats.org/drawingml/2006/chart" r:id="Raf0eafbaf7de4696"/>
           </a:graphicData>
         </a:graphic>
       </p:graphicFrame>
       <p:graphicFrame>
         <p:nvGraphicFramePr>
-          <p:cNvPr id="10027" name="referenceline=100"/>
+          <p:cNvPr id="100027" name="referenceline=100"/>
           <p:cNvGraphicFramePr/>
           <p:nvPr/>
         </p:nvGraphicFramePr>
@@ -6410,13 +6412,13 @@
         </p:xfrm>
         <a:graphic xmlns:a="http://schemas.openxmlformats.org/drawingml/2006/main">
           <a:graphicData uri="http://schemas.openxmlformats.org/drawingml/2006/chart">
-            <c:chart xmlns:r="http://schemas.openxmlformats.org/officeDocument/2006/relationships" xmlns:c="http://schemas.openxmlformats.org/drawingml/2006/chart" r:id="R2ddbad1de13b4f98"/>
+            <c:chart xmlns:r="http://schemas.openxmlformats.org/officeDocument/2006/relationships" xmlns:c="http://schemas.openxmlformats.org/drawingml/2006/chart" r:id="Rec3cc2e130314ffa"/>
           </a:graphicData>
         </a:graphic>
       </p:graphicFrame>
       <p:graphicFrame>
         <p:nvGraphicFramePr>
-          <p:cNvPr id="10028" name="errbars=percentage:10"/>
+          <p:cNvPr id="100028" name="errbars=percentage:10"/>
           <p:cNvGraphicFramePr/>
           <p:nvPr/>
         </p:nvGraphicFramePr>
@@ -6426,13 +6428,13 @@
         </p:xfrm>
         <a:graphic xmlns:a="http://schemas.openxmlformats.org/drawingml/2006/main">
           <a:graphicData uri="http://schemas.openxmlformats.org/drawingml/2006/chart">
-            <c:chart xmlns:r="http://schemas.openxmlformats.org/officeDocument/2006/relationships" xmlns:c="http://schemas.openxmlformats.org/drawingml/2006/chart" r:id="Rd10a0e4a4bc948c5"/>
+            <c:chart xmlns:r="http://schemas.openxmlformats.org/officeDocument/2006/relationships" xmlns:c="http://schemas.openxmlformats.org/drawingml/2006/chart" r:id="Rc91794c9bda74459"/>
           </a:graphicData>
         </a:graphic>
       </p:graphicFrame>
       <p:graphicFrame>
         <p:nvGraphicFramePr>
-          <p:cNvPr id="10029" name="dataTable=true + trendline=linear"/>
+          <p:cNvPr id="100029" name="dataTable=true + trendline=linear"/>
           <p:cNvGraphicFramePr/>
           <p:nvPr/>
         </p:nvGraphicFramePr>
@@ -6442,7 +6444,7 @@
         </p:xfrm>
         <a:graphic xmlns:a="http://schemas.openxmlformats.org/drawingml/2006/main">
           <a:graphicData uri="http://schemas.openxmlformats.org/drawingml/2006/chart">
-            <c:chart xmlns:r="http://schemas.openxmlformats.org/officeDocument/2006/relationships" xmlns:c="http://schemas.openxmlformats.org/drawingml/2006/chart" r:id="R4c465aa97ff644a3"/>
+            <c:chart xmlns:r="http://schemas.openxmlformats.org/officeDocument/2006/relationships" xmlns:c="http://schemas.openxmlformats.org/drawingml/2006/chart" r:id="Rd0017acc96f74e87"/>
           </a:graphicData>
         </a:graphic>
       </p:graphicFrame>
@@ -6463,8 +6465,8 @@
       <p:grpSpPr/>
       <p:sp>
         <p:nvSpPr>
-          <p:cNvPr id="10030" name="TextBox 1"/>
-          <p:cNvSpPr/>
+          <p:cNvPr id="100030" name="TextBox 1"/>
+          <p:cNvSpPr txBox="1"/>
           <p:nvPr/>
         </p:nvSpPr>
         <p:spPr>
@@ -6491,7 +6493,7 @@
       </p:sp>
       <p:graphicFrame>
         <p:nvGraphicFramePr>
-          <p:cNvPr id="10031" name="chartareafill + plotFill + borders"/>
+          <p:cNvPr id="100031" name="chartareafill + plotFill + borders"/>
           <p:cNvGraphicFramePr/>
           <p:nvPr/>
         </p:nvGraphicFramePr>
@@ -6501,13 +6503,13 @@
         </p:xfrm>
         <a:graphic xmlns:a="http://schemas.openxmlformats.org/drawingml/2006/main">
           <a:graphicData uri="http://schemas.openxmlformats.org/drawingml/2006/chart">
-            <c:chart xmlns:r="http://schemas.openxmlformats.org/officeDocument/2006/relationships" xmlns:c="http://schemas.openxmlformats.org/drawingml/2006/chart" r:id="R86a6d41ded5e4486"/>
+            <c:chart xmlns:r="http://schemas.openxmlformats.org/officeDocument/2006/relationships" xmlns:c="http://schemas.openxmlformats.org/drawingml/2006/chart" r:id="R8ab25673467d41b9"/>
           </a:graphicData>
         </a:graphic>
       </p:graphicFrame>
       <p:graphicFrame>
         <p:nvGraphicFramePr>
-          <p:cNvPr id="10032" name="roundedcorners=true"/>
+          <p:cNvPr id="100032" name="roundedcorners=true"/>
           <p:cNvGraphicFramePr/>
           <p:nvPr/>
         </p:nvGraphicFramePr>
@@ -6517,13 +6519,13 @@
         </p:xfrm>
         <a:graphic xmlns:a="http://schemas.openxmlformats.org/drawingml/2006/main">
           <a:graphicData uri="http://schemas.openxmlformats.org/drawingml/2006/chart">
-            <c:chart xmlns:r="http://schemas.openxmlformats.org/officeDocument/2006/relationships" xmlns:c="http://schemas.openxmlformats.org/drawingml/2006/chart" r:id="R7d63e6a9346d4e18"/>
+            <c:chart xmlns:r="http://schemas.openxmlformats.org/officeDocument/2006/relationships" xmlns:c="http://schemas.openxmlformats.org/drawingml/2006/chart" r:id="R64f11838ae694ee4"/>
           </a:graphicData>
         </a:graphic>
       </p:graphicFrame>
       <p:graphicFrame>
         <p:nvGraphicFramePr>
-          <p:cNvPr id="10033" name="plotFill=none, gridlines=none"/>
+          <p:cNvPr id="100033" name="plotFill=none, gridlines=none"/>
           <p:cNvGraphicFramePr/>
           <p:nvPr/>
         </p:nvGraphicFramePr>
@@ -6533,13 +6535,13 @@
         </p:xfrm>
         <a:graphic xmlns:a="http://schemas.openxmlformats.org/drawingml/2006/main">
           <a:graphicData uri="http://schemas.openxmlformats.org/drawingml/2006/chart">
-            <c:chart xmlns:r="http://schemas.openxmlformats.org/officeDocument/2006/relationships" xmlns:c="http://schemas.openxmlformats.org/drawingml/2006/chart" r:id="R8643c43180c74e7c"/>
+            <c:chart xmlns:r="http://schemas.openxmlformats.org/officeDocument/2006/relationships" xmlns:c="http://schemas.openxmlformats.org/drawingml/2006/chart" r:id="R1cfc53b35de34a2e"/>
           </a:graphicData>
         </a:graphic>
       </p:graphicFrame>
       <p:graphicFrame>
         <p:nvGraphicFramePr>
-          <p:cNvPr id="10034" name="varyColors=true (single series)"/>
+          <p:cNvPr id="100034" name="varyColors=true (single series)"/>
           <p:cNvGraphicFramePr/>
           <p:nvPr/>
         </p:nvGraphicFramePr>
@@ -6549,7 +6551,7 @@
         </p:xfrm>
         <a:graphic xmlns:a="http://schemas.openxmlformats.org/drawingml/2006/main">
           <a:graphicData uri="http://schemas.openxmlformats.org/drawingml/2006/chart">
-            <c:chart xmlns:r="http://schemas.openxmlformats.org/officeDocument/2006/relationships" xmlns:c="http://schemas.openxmlformats.org/drawingml/2006/chart" r:id="Ra57c4e0a3d074ca3"/>
+            <c:chart xmlns:r="http://schemas.openxmlformats.org/officeDocument/2006/relationships" xmlns:c="http://schemas.openxmlformats.org/drawingml/2006/chart" r:id="R0b49ef27ac854381"/>
           </a:graphicData>
         </a:graphic>
       </p:graphicFrame>
@@ -6570,8 +6572,8 @@
       <p:grpSpPr/>
       <p:sp>
         <p:nvSpPr>
-          <p:cNvPr id="10035" name="TextBox 1"/>
-          <p:cNvSpPr/>
+          <p:cNvPr id="100035" name="TextBox 1"/>
+          <p:cNvSpPr txBox="1"/>
           <p:nvPr/>
         </p:nvSpPr>
         <p:spPr>
@@ -6598,7 +6600,7 @@
       </p:sp>
       <p:graphicFrame>
         <p:nvGraphicFramePr>
-          <p:cNvPr id="10036" name="preset=minimal"/>
+          <p:cNvPr id="100036" name="preset=minimal"/>
           <p:cNvGraphicFramePr/>
           <p:nvPr/>
         </p:nvGraphicFramePr>
@@ -6608,13 +6610,13 @@
         </p:xfrm>
         <a:graphic xmlns:a="http://schemas.openxmlformats.org/drawingml/2006/main">
           <a:graphicData uri="http://schemas.openxmlformats.org/drawingml/2006/chart">
-            <c:chart xmlns:r="http://schemas.openxmlformats.org/officeDocument/2006/relationships" xmlns:c="http://schemas.openxmlformats.org/drawingml/2006/chart" r:id="R6ee052bc1ae64c69"/>
+            <c:chart xmlns:r="http://schemas.openxmlformats.org/officeDocument/2006/relationships" xmlns:c="http://schemas.openxmlformats.org/drawingml/2006/chart" r:id="Rd3ea7f645c204950"/>
           </a:graphicData>
         </a:graphic>
       </p:graphicFrame>
       <p:graphicFrame>
         <p:nvGraphicFramePr>
-          <p:cNvPr id="10037" name="preset=corporate"/>
+          <p:cNvPr id="100037" name="preset=corporate"/>
           <p:cNvGraphicFramePr/>
           <p:nvPr/>
         </p:nvGraphicFramePr>
@@ -6624,13 +6626,13 @@
         </p:xfrm>
         <a:graphic xmlns:a="http://schemas.openxmlformats.org/drawingml/2006/main">
           <a:graphicData uri="http://schemas.openxmlformats.org/drawingml/2006/chart">
-            <c:chart xmlns:r="http://schemas.openxmlformats.org/officeDocument/2006/relationships" xmlns:c="http://schemas.openxmlformats.org/drawingml/2006/chart" r:id="Re247ac87974d4de8"/>
+            <c:chart xmlns:r="http://schemas.openxmlformats.org/officeDocument/2006/relationships" xmlns:c="http://schemas.openxmlformats.org/drawingml/2006/chart" r:id="Ra5f0b4a809df4f93"/>
           </a:graphicData>
         </a:graphic>
       </p:graphicFrame>
       <p:graphicFrame>
         <p:nvGraphicFramePr>
-          <p:cNvPr id="10038" name="preset=dark"/>
+          <p:cNvPr id="100038" name="preset=dark"/>
           <p:cNvGraphicFramePr/>
           <p:nvPr/>
         </p:nvGraphicFramePr>
@@ -6640,13 +6642,13 @@
         </p:xfrm>
         <a:graphic xmlns:a="http://schemas.openxmlformats.org/drawingml/2006/main">
           <a:graphicData uri="http://schemas.openxmlformats.org/drawingml/2006/chart">
-            <c:chart xmlns:r="http://schemas.openxmlformats.org/officeDocument/2006/relationships" xmlns:c="http://schemas.openxmlformats.org/drawingml/2006/chart" r:id="R0804d9db3db44d83"/>
+            <c:chart xmlns:r="http://schemas.openxmlformats.org/officeDocument/2006/relationships" xmlns:c="http://schemas.openxmlformats.org/drawingml/2006/chart" r:id="R7f6f7f368e444271"/>
           </a:graphicData>
         </a:graphic>
       </p:graphicFrame>
       <p:graphicFrame>
         <p:nvGraphicFramePr>
-          <p:cNvPr id="10039" name="seriesN.* Add + chart-series Set"/>
+          <p:cNvPr id="100039" name="seriesN.* Add + chart-series Set"/>
           <p:cNvGraphicFramePr/>
           <p:nvPr/>
         </p:nvGraphicFramePr>
@@ -6656,7 +6658,7 @@
         </p:xfrm>
         <a:graphic xmlns:a="http://schemas.openxmlformats.org/drawingml/2006/main">
           <a:graphicData uri="http://schemas.openxmlformats.org/drawingml/2006/chart">
-            <c:chart xmlns:r="http://schemas.openxmlformats.org/officeDocument/2006/relationships" xmlns:c="http://schemas.openxmlformats.org/drawingml/2006/chart" r:id="R4e626961e206460b"/>
+            <c:chart xmlns:r="http://schemas.openxmlformats.org/officeDocument/2006/relationships" xmlns:c="http://schemas.openxmlformats.org/drawingml/2006/chart" r:id="R6763546c426841cf"/>
           </a:graphicData>
         </a:graphic>
       </p:graphicFrame>
